--- a/assets/powerpoints/module-activite/C2-prenez-la-ne-la-lachez-pas.pptx
+++ b/assets/powerpoints/module-activite/C2-prenez-la-ne-la-lachez-pas.pptx
@@ -7298,7 +7298,43 @@
                 </a:solidFill>
                 <a:latin typeface="Verdana"/>
               </a:rPr>
-              <a:t>Verbe, puis &lt;b&gt;le / la / les&lt;/b&gt;, puis &lt;b&gt;moi / lui / leur&lt;/b&gt;. Toujours dans cet ordre.</a:t>
+              <a:t>Verbe, puis </a:t>
+            </a:r>
+            <a:r>
+              <a:rPr sz="1600" b="1" i="0">
+                <a:solidFill>
+                  <a:srgbClr val="3A3D40"/>
+                </a:solidFill>
+                <a:latin typeface="Verdana"/>
+              </a:rPr>
+              <a:t>le / la / les</a:t>
+            </a:r>
+            <a:r>
+              <a:rPr sz="1600" b="0" i="0">
+                <a:solidFill>
+                  <a:srgbClr val="3A3D40"/>
+                </a:solidFill>
+                <a:latin typeface="Verdana"/>
+              </a:rPr>
+              <a:t>, puis </a:t>
+            </a:r>
+            <a:r>
+              <a:rPr sz="1600" b="1" i="0">
+                <a:solidFill>
+                  <a:srgbClr val="3A3D40"/>
+                </a:solidFill>
+                <a:latin typeface="Verdana"/>
+              </a:rPr>
+              <a:t>moi / lui / leur</a:t>
+            </a:r>
+            <a:r>
+              <a:rPr sz="1600" b="0" i="0">
+                <a:solidFill>
+                  <a:srgbClr val="3A3D40"/>
+                </a:solidFill>
+                <a:latin typeface="Verdana"/>
+              </a:rPr>
+              <a:t>. Toujours dans cet ordre.</a:t>
             </a:r>
           </a:p>
         </p:txBody>
@@ -10986,7 +11022,25 @@
                 </a:solidFill>
                 <a:latin typeface="Verdana"/>
               </a:rPr>
-              <a:t>À la négative, tout revient devant le verbe. C'est la faute la plus fréquente, parce qu'on a la forme affirmative en tête. Le repère : s'il y a un « ne », le pronom est &lt;b&gt;avant&lt;/b&gt;.</a:t>
+              <a:t>À la négative, tout revient devant le verbe. C'est la faute la plus fréquente, parce qu'on a la forme affirmative en tête. Le repère : s'il y a un « ne », le pronom est </a:t>
+            </a:r>
+            <a:r>
+              <a:rPr sz="2000" b="1" i="0">
+                <a:solidFill>
+                  <a:srgbClr val="4B4F52"/>
+                </a:solidFill>
+                <a:latin typeface="Verdana"/>
+              </a:rPr>
+              <a:t>avant</a:t>
+            </a:r>
+            <a:r>
+              <a:rPr sz="2000" b="0" i="0">
+                <a:solidFill>
+                  <a:srgbClr val="4B4F52"/>
+                </a:solidFill>
+                <a:latin typeface="Verdana"/>
+              </a:rPr>
+              <a:t>.</a:t>
             </a:r>
           </a:p>
         </p:txBody>
